--- a/宣道詩/(宣道詩50)我曾捨命為你.pptx
+++ b/宣道詩/(宣道詩50)我曾捨命為你.pptx
@@ -169,10 +169,9 @@
           <a:lstStyle/>
           <a:p>
             <a:r>
-              <a:rPr lang="zh-TW" altLang="en-US" smtClean="0"/>
+              <a:rPr lang="zh-TW" altLang="en-US"/>
               <a:t>按一下以編輯母片標題樣式</a:t>
             </a:r>
-            <a:endParaRPr lang="zh-TW" altLang="en-US"/>
           </a:p>
         </p:txBody>
       </p:sp>
@@ -288,10 +287,9 @@
           </a:lstStyle>
           <a:p>
             <a:r>
-              <a:rPr lang="zh-TW" altLang="en-US" smtClean="0"/>
+              <a:rPr lang="zh-TW" altLang="en-US"/>
               <a:t>按一下以編輯母片副標題樣式</a:t>
             </a:r>
-            <a:endParaRPr lang="zh-TW" altLang="en-US"/>
           </a:p>
         </p:txBody>
       </p:sp>
@@ -313,7 +311,7 @@
             <a:fld id="{13AF73FB-44CF-4BEB-A129-C9AADD3689D5}" type="datetimeFigureOut">
               <a:rPr lang="zh-TW" altLang="en-US" smtClean="0"/>
               <a:pPr/>
-              <a:t>2022/7/1</a:t>
+              <a:t>2024/11/30</a:t>
             </a:fld>
             <a:endParaRPr lang="zh-TW" altLang="en-US"/>
           </a:p>
@@ -403,10 +401,9 @@
           <a:lstStyle/>
           <a:p>
             <a:r>
-              <a:rPr lang="zh-TW" altLang="en-US" smtClean="0"/>
+              <a:rPr lang="zh-TW" altLang="en-US"/>
               <a:t>按一下以編輯母片標題樣式</a:t>
             </a:r>
-            <a:endParaRPr lang="zh-TW" altLang="en-US"/>
           </a:p>
         </p:txBody>
       </p:sp>
@@ -427,38 +424,37 @@
           <a:p>
             <a:pPr lvl="0"/>
             <a:r>
-              <a:rPr lang="zh-TW" altLang="en-US" smtClean="0"/>
+              <a:rPr lang="zh-TW" altLang="en-US"/>
               <a:t>按一下以編輯母片文字樣式</a:t>
             </a:r>
           </a:p>
           <a:p>
             <a:pPr lvl="1"/>
             <a:r>
-              <a:rPr lang="zh-TW" altLang="en-US" smtClean="0"/>
+              <a:rPr lang="zh-TW" altLang="en-US"/>
               <a:t>第二層</a:t>
             </a:r>
           </a:p>
           <a:p>
             <a:pPr lvl="2"/>
             <a:r>
-              <a:rPr lang="zh-TW" altLang="en-US" smtClean="0"/>
+              <a:rPr lang="zh-TW" altLang="en-US"/>
               <a:t>第三層</a:t>
             </a:r>
           </a:p>
           <a:p>
             <a:pPr lvl="3"/>
             <a:r>
-              <a:rPr lang="zh-TW" altLang="en-US" smtClean="0"/>
+              <a:rPr lang="zh-TW" altLang="en-US"/>
               <a:t>第四層</a:t>
             </a:r>
           </a:p>
           <a:p>
             <a:pPr lvl="4"/>
             <a:r>
-              <a:rPr lang="zh-TW" altLang="en-US" smtClean="0"/>
+              <a:rPr lang="zh-TW" altLang="en-US"/>
               <a:t>第五層</a:t>
             </a:r>
-            <a:endParaRPr lang="zh-TW" altLang="en-US"/>
           </a:p>
         </p:txBody>
       </p:sp>
@@ -480,7 +476,7 @@
             <a:fld id="{13AF73FB-44CF-4BEB-A129-C9AADD3689D5}" type="datetimeFigureOut">
               <a:rPr lang="zh-TW" altLang="en-US" smtClean="0"/>
               <a:pPr/>
-              <a:t>2022/7/1</a:t>
+              <a:t>2024/11/30</a:t>
             </a:fld>
             <a:endParaRPr lang="zh-TW" altLang="en-US"/>
           </a:p>
@@ -575,10 +571,9 @@
           <a:lstStyle/>
           <a:p>
             <a:r>
-              <a:rPr lang="zh-TW" altLang="en-US" smtClean="0"/>
+              <a:rPr lang="zh-TW" altLang="en-US"/>
               <a:t>按一下以編輯母片標題樣式</a:t>
             </a:r>
-            <a:endParaRPr lang="zh-TW" altLang="en-US"/>
           </a:p>
         </p:txBody>
       </p:sp>
@@ -604,38 +599,37 @@
           <a:p>
             <a:pPr lvl="0"/>
             <a:r>
-              <a:rPr lang="zh-TW" altLang="en-US" smtClean="0"/>
+              <a:rPr lang="zh-TW" altLang="en-US"/>
               <a:t>按一下以編輯母片文字樣式</a:t>
             </a:r>
           </a:p>
           <a:p>
             <a:pPr lvl="1"/>
             <a:r>
-              <a:rPr lang="zh-TW" altLang="en-US" smtClean="0"/>
+              <a:rPr lang="zh-TW" altLang="en-US"/>
               <a:t>第二層</a:t>
             </a:r>
           </a:p>
           <a:p>
             <a:pPr lvl="2"/>
             <a:r>
-              <a:rPr lang="zh-TW" altLang="en-US" smtClean="0"/>
+              <a:rPr lang="zh-TW" altLang="en-US"/>
               <a:t>第三層</a:t>
             </a:r>
           </a:p>
           <a:p>
             <a:pPr lvl="3"/>
             <a:r>
-              <a:rPr lang="zh-TW" altLang="en-US" smtClean="0"/>
+              <a:rPr lang="zh-TW" altLang="en-US"/>
               <a:t>第四層</a:t>
             </a:r>
           </a:p>
           <a:p>
             <a:pPr lvl="4"/>
             <a:r>
-              <a:rPr lang="zh-TW" altLang="en-US" smtClean="0"/>
+              <a:rPr lang="zh-TW" altLang="en-US"/>
               <a:t>第五層</a:t>
             </a:r>
-            <a:endParaRPr lang="zh-TW" altLang="en-US"/>
           </a:p>
         </p:txBody>
       </p:sp>
@@ -657,7 +651,7 @@
             <a:fld id="{13AF73FB-44CF-4BEB-A129-C9AADD3689D5}" type="datetimeFigureOut">
               <a:rPr lang="zh-TW" altLang="en-US" smtClean="0"/>
               <a:pPr/>
-              <a:t>2022/7/1</a:t>
+              <a:t>2024/11/30</a:t>
             </a:fld>
             <a:endParaRPr lang="zh-TW" altLang="en-US"/>
           </a:p>
@@ -747,10 +741,9 @@
           <a:lstStyle/>
           <a:p>
             <a:r>
-              <a:rPr lang="zh-TW" altLang="en-US" smtClean="0"/>
+              <a:rPr lang="zh-TW" altLang="en-US"/>
               <a:t>按一下以編輯母片標題樣式</a:t>
             </a:r>
-            <a:endParaRPr lang="zh-TW" altLang="en-US"/>
           </a:p>
         </p:txBody>
       </p:sp>
@@ -771,38 +764,37 @@
           <a:p>
             <a:pPr lvl="0"/>
             <a:r>
-              <a:rPr lang="zh-TW" altLang="en-US" smtClean="0"/>
+              <a:rPr lang="zh-TW" altLang="en-US"/>
               <a:t>按一下以編輯母片文字樣式</a:t>
             </a:r>
           </a:p>
           <a:p>
             <a:pPr lvl="1"/>
             <a:r>
-              <a:rPr lang="zh-TW" altLang="en-US" smtClean="0"/>
+              <a:rPr lang="zh-TW" altLang="en-US"/>
               <a:t>第二層</a:t>
             </a:r>
           </a:p>
           <a:p>
             <a:pPr lvl="2"/>
             <a:r>
-              <a:rPr lang="zh-TW" altLang="en-US" smtClean="0"/>
+              <a:rPr lang="zh-TW" altLang="en-US"/>
               <a:t>第三層</a:t>
             </a:r>
           </a:p>
           <a:p>
             <a:pPr lvl="3"/>
             <a:r>
-              <a:rPr lang="zh-TW" altLang="en-US" smtClean="0"/>
+              <a:rPr lang="zh-TW" altLang="en-US"/>
               <a:t>第四層</a:t>
             </a:r>
           </a:p>
           <a:p>
             <a:pPr lvl="4"/>
             <a:r>
-              <a:rPr lang="zh-TW" altLang="en-US" smtClean="0"/>
+              <a:rPr lang="zh-TW" altLang="en-US"/>
               <a:t>第五層</a:t>
             </a:r>
-            <a:endParaRPr lang="zh-TW" altLang="en-US"/>
           </a:p>
         </p:txBody>
       </p:sp>
@@ -824,7 +816,7 @@
             <a:fld id="{13AF73FB-44CF-4BEB-A129-C9AADD3689D5}" type="datetimeFigureOut">
               <a:rPr lang="zh-TW" altLang="en-US" smtClean="0"/>
               <a:pPr/>
-              <a:t>2022/7/1</a:t>
+              <a:t>2024/11/30</a:t>
             </a:fld>
             <a:endParaRPr lang="zh-TW" altLang="en-US"/>
           </a:p>
@@ -923,10 +915,9 @@
           </a:lstStyle>
           <a:p>
             <a:r>
-              <a:rPr lang="zh-TW" altLang="en-US" smtClean="0"/>
+              <a:rPr lang="zh-TW" altLang="en-US"/>
               <a:t>按一下以編輯母片標題樣式</a:t>
             </a:r>
-            <a:endParaRPr lang="zh-TW" altLang="en-US"/>
           </a:p>
         </p:txBody>
       </p:sp>
@@ -1043,7 +1034,7 @@
           <a:p>
             <a:pPr lvl="0"/>
             <a:r>
-              <a:rPr lang="zh-TW" altLang="en-US" smtClean="0"/>
+              <a:rPr lang="zh-TW" altLang="en-US"/>
               <a:t>按一下以編輯母片文字樣式</a:t>
             </a:r>
           </a:p>
@@ -1067,7 +1058,7 @@
             <a:fld id="{13AF73FB-44CF-4BEB-A129-C9AADD3689D5}" type="datetimeFigureOut">
               <a:rPr lang="zh-TW" altLang="en-US" smtClean="0"/>
               <a:pPr/>
-              <a:t>2022/7/1</a:t>
+              <a:t>2024/11/30</a:t>
             </a:fld>
             <a:endParaRPr lang="zh-TW" altLang="en-US"/>
           </a:p>
@@ -1157,10 +1148,9 @@
           <a:lstStyle/>
           <a:p>
             <a:r>
-              <a:rPr lang="zh-TW" altLang="en-US" smtClean="0"/>
+              <a:rPr lang="zh-TW" altLang="en-US"/>
               <a:t>按一下以編輯母片標題樣式</a:t>
             </a:r>
-            <a:endParaRPr lang="zh-TW" altLang="en-US"/>
           </a:p>
         </p:txBody>
       </p:sp>
@@ -1214,38 +1204,37 @@
           <a:p>
             <a:pPr lvl="0"/>
             <a:r>
-              <a:rPr lang="zh-TW" altLang="en-US" smtClean="0"/>
+              <a:rPr lang="zh-TW" altLang="en-US"/>
               <a:t>按一下以編輯母片文字樣式</a:t>
             </a:r>
           </a:p>
           <a:p>
             <a:pPr lvl="1"/>
             <a:r>
-              <a:rPr lang="zh-TW" altLang="en-US" smtClean="0"/>
+              <a:rPr lang="zh-TW" altLang="en-US"/>
               <a:t>第二層</a:t>
             </a:r>
           </a:p>
           <a:p>
             <a:pPr lvl="2"/>
             <a:r>
-              <a:rPr lang="zh-TW" altLang="en-US" smtClean="0"/>
+              <a:rPr lang="zh-TW" altLang="en-US"/>
               <a:t>第三層</a:t>
             </a:r>
           </a:p>
           <a:p>
             <a:pPr lvl="3"/>
             <a:r>
-              <a:rPr lang="zh-TW" altLang="en-US" smtClean="0"/>
+              <a:rPr lang="zh-TW" altLang="en-US"/>
               <a:t>第四層</a:t>
             </a:r>
           </a:p>
           <a:p>
             <a:pPr lvl="4"/>
             <a:r>
-              <a:rPr lang="zh-TW" altLang="en-US" smtClean="0"/>
+              <a:rPr lang="zh-TW" altLang="en-US"/>
               <a:t>第五層</a:t>
             </a:r>
-            <a:endParaRPr lang="zh-TW" altLang="en-US"/>
           </a:p>
         </p:txBody>
       </p:sp>
@@ -1299,38 +1288,37 @@
           <a:p>
             <a:pPr lvl="0"/>
             <a:r>
-              <a:rPr lang="zh-TW" altLang="en-US" smtClean="0"/>
+              <a:rPr lang="zh-TW" altLang="en-US"/>
               <a:t>按一下以編輯母片文字樣式</a:t>
             </a:r>
           </a:p>
           <a:p>
             <a:pPr lvl="1"/>
             <a:r>
-              <a:rPr lang="zh-TW" altLang="en-US" smtClean="0"/>
+              <a:rPr lang="zh-TW" altLang="en-US"/>
               <a:t>第二層</a:t>
             </a:r>
           </a:p>
           <a:p>
             <a:pPr lvl="2"/>
             <a:r>
-              <a:rPr lang="zh-TW" altLang="en-US" smtClean="0"/>
+              <a:rPr lang="zh-TW" altLang="en-US"/>
               <a:t>第三層</a:t>
             </a:r>
           </a:p>
           <a:p>
             <a:pPr lvl="3"/>
             <a:r>
-              <a:rPr lang="zh-TW" altLang="en-US" smtClean="0"/>
+              <a:rPr lang="zh-TW" altLang="en-US"/>
               <a:t>第四層</a:t>
             </a:r>
           </a:p>
           <a:p>
             <a:pPr lvl="4"/>
             <a:r>
-              <a:rPr lang="zh-TW" altLang="en-US" smtClean="0"/>
+              <a:rPr lang="zh-TW" altLang="en-US"/>
               <a:t>第五層</a:t>
             </a:r>
-            <a:endParaRPr lang="zh-TW" altLang="en-US"/>
           </a:p>
         </p:txBody>
       </p:sp>
@@ -1352,7 +1340,7 @@
             <a:fld id="{13AF73FB-44CF-4BEB-A129-C9AADD3689D5}" type="datetimeFigureOut">
               <a:rPr lang="zh-TW" altLang="en-US" smtClean="0"/>
               <a:pPr/>
-              <a:t>2022/7/1</a:t>
+              <a:t>2024/11/30</a:t>
             </a:fld>
             <a:endParaRPr lang="zh-TW" altLang="en-US"/>
           </a:p>
@@ -1446,10 +1434,9 @@
           </a:lstStyle>
           <a:p>
             <a:r>
-              <a:rPr lang="zh-TW" altLang="en-US" smtClean="0"/>
+              <a:rPr lang="zh-TW" altLang="en-US"/>
               <a:t>按一下以編輯母片標題樣式</a:t>
             </a:r>
-            <a:endParaRPr lang="zh-TW" altLang="en-US"/>
           </a:p>
         </p:txBody>
       </p:sp>
@@ -1512,7 +1499,7 @@
           <a:p>
             <a:pPr lvl="0"/>
             <a:r>
-              <a:rPr lang="zh-TW" altLang="en-US" smtClean="0"/>
+              <a:rPr lang="zh-TW" altLang="en-US"/>
               <a:t>按一下以編輯母片文字樣式</a:t>
             </a:r>
           </a:p>
@@ -1568,38 +1555,37 @@
           <a:p>
             <a:pPr lvl="0"/>
             <a:r>
-              <a:rPr lang="zh-TW" altLang="en-US" smtClean="0"/>
+              <a:rPr lang="zh-TW" altLang="en-US"/>
               <a:t>按一下以編輯母片文字樣式</a:t>
             </a:r>
           </a:p>
           <a:p>
             <a:pPr lvl="1"/>
             <a:r>
-              <a:rPr lang="zh-TW" altLang="en-US" smtClean="0"/>
+              <a:rPr lang="zh-TW" altLang="en-US"/>
               <a:t>第二層</a:t>
             </a:r>
           </a:p>
           <a:p>
             <a:pPr lvl="2"/>
             <a:r>
-              <a:rPr lang="zh-TW" altLang="en-US" smtClean="0"/>
+              <a:rPr lang="zh-TW" altLang="en-US"/>
               <a:t>第三層</a:t>
             </a:r>
           </a:p>
           <a:p>
             <a:pPr lvl="3"/>
             <a:r>
-              <a:rPr lang="zh-TW" altLang="en-US" smtClean="0"/>
+              <a:rPr lang="zh-TW" altLang="en-US"/>
               <a:t>第四層</a:t>
             </a:r>
           </a:p>
           <a:p>
             <a:pPr lvl="4"/>
             <a:r>
-              <a:rPr lang="zh-TW" altLang="en-US" smtClean="0"/>
+              <a:rPr lang="zh-TW" altLang="en-US"/>
               <a:t>第五層</a:t>
             </a:r>
-            <a:endParaRPr lang="zh-TW" altLang="en-US"/>
           </a:p>
         </p:txBody>
       </p:sp>
@@ -1662,7 +1648,7 @@
           <a:p>
             <a:pPr lvl="0"/>
             <a:r>
-              <a:rPr lang="zh-TW" altLang="en-US" smtClean="0"/>
+              <a:rPr lang="zh-TW" altLang="en-US"/>
               <a:t>按一下以編輯母片文字樣式</a:t>
             </a:r>
           </a:p>
@@ -1718,38 +1704,37 @@
           <a:p>
             <a:pPr lvl="0"/>
             <a:r>
-              <a:rPr lang="zh-TW" altLang="en-US" smtClean="0"/>
+              <a:rPr lang="zh-TW" altLang="en-US"/>
               <a:t>按一下以編輯母片文字樣式</a:t>
             </a:r>
           </a:p>
           <a:p>
             <a:pPr lvl="1"/>
             <a:r>
-              <a:rPr lang="zh-TW" altLang="en-US" smtClean="0"/>
+              <a:rPr lang="zh-TW" altLang="en-US"/>
               <a:t>第二層</a:t>
             </a:r>
           </a:p>
           <a:p>
             <a:pPr lvl="2"/>
             <a:r>
-              <a:rPr lang="zh-TW" altLang="en-US" smtClean="0"/>
+              <a:rPr lang="zh-TW" altLang="en-US"/>
               <a:t>第三層</a:t>
             </a:r>
           </a:p>
           <a:p>
             <a:pPr lvl="3"/>
             <a:r>
-              <a:rPr lang="zh-TW" altLang="en-US" smtClean="0"/>
+              <a:rPr lang="zh-TW" altLang="en-US"/>
               <a:t>第四層</a:t>
             </a:r>
           </a:p>
           <a:p>
             <a:pPr lvl="4"/>
             <a:r>
-              <a:rPr lang="zh-TW" altLang="en-US" smtClean="0"/>
+              <a:rPr lang="zh-TW" altLang="en-US"/>
               <a:t>第五層</a:t>
             </a:r>
-            <a:endParaRPr lang="zh-TW" altLang="en-US"/>
           </a:p>
         </p:txBody>
       </p:sp>
@@ -1771,7 +1756,7 @@
             <a:fld id="{13AF73FB-44CF-4BEB-A129-C9AADD3689D5}" type="datetimeFigureOut">
               <a:rPr lang="zh-TW" altLang="en-US" smtClean="0"/>
               <a:pPr/>
-              <a:t>2022/7/1</a:t>
+              <a:t>2024/11/30</a:t>
             </a:fld>
             <a:endParaRPr lang="zh-TW" altLang="en-US"/>
           </a:p>
@@ -1861,10 +1846,9 @@
           <a:lstStyle/>
           <a:p>
             <a:r>
-              <a:rPr lang="zh-TW" altLang="en-US" smtClean="0"/>
+              <a:rPr lang="zh-TW" altLang="en-US"/>
               <a:t>按一下以編輯母片標題樣式</a:t>
             </a:r>
-            <a:endParaRPr lang="zh-TW" altLang="en-US"/>
           </a:p>
         </p:txBody>
       </p:sp>
@@ -1886,7 +1870,7 @@
             <a:fld id="{13AF73FB-44CF-4BEB-A129-C9AADD3689D5}" type="datetimeFigureOut">
               <a:rPr lang="zh-TW" altLang="en-US" smtClean="0"/>
               <a:pPr/>
-              <a:t>2022/7/1</a:t>
+              <a:t>2024/11/30</a:t>
             </a:fld>
             <a:endParaRPr lang="zh-TW" altLang="en-US"/>
           </a:p>
@@ -1978,7 +1962,7 @@
             <a:fld id="{13AF73FB-44CF-4BEB-A129-C9AADD3689D5}" type="datetimeFigureOut">
               <a:rPr lang="zh-TW" altLang="en-US" smtClean="0"/>
               <a:pPr/>
-              <a:t>2022/7/1</a:t>
+              <a:t>2024/11/30</a:t>
             </a:fld>
             <a:endParaRPr lang="zh-TW" altLang="en-US"/>
           </a:p>
@@ -2077,10 +2061,9 @@
           </a:lstStyle>
           <a:p>
             <a:r>
-              <a:rPr lang="zh-TW" altLang="en-US" smtClean="0"/>
+              <a:rPr lang="zh-TW" altLang="en-US"/>
               <a:t>按一下以編輯母片標題樣式</a:t>
             </a:r>
-            <a:endParaRPr lang="zh-TW" altLang="en-US"/>
           </a:p>
         </p:txBody>
       </p:sp>
@@ -2134,38 +2117,37 @@
           <a:p>
             <a:pPr lvl="0"/>
             <a:r>
-              <a:rPr lang="zh-TW" altLang="en-US" smtClean="0"/>
+              <a:rPr lang="zh-TW" altLang="en-US"/>
               <a:t>按一下以編輯母片文字樣式</a:t>
             </a:r>
           </a:p>
           <a:p>
             <a:pPr lvl="1"/>
             <a:r>
-              <a:rPr lang="zh-TW" altLang="en-US" smtClean="0"/>
+              <a:rPr lang="zh-TW" altLang="en-US"/>
               <a:t>第二層</a:t>
             </a:r>
           </a:p>
           <a:p>
             <a:pPr lvl="2"/>
             <a:r>
-              <a:rPr lang="zh-TW" altLang="en-US" smtClean="0"/>
+              <a:rPr lang="zh-TW" altLang="en-US"/>
               <a:t>第三層</a:t>
             </a:r>
           </a:p>
           <a:p>
             <a:pPr lvl="3"/>
             <a:r>
-              <a:rPr lang="zh-TW" altLang="en-US" smtClean="0"/>
+              <a:rPr lang="zh-TW" altLang="en-US"/>
               <a:t>第四層</a:t>
             </a:r>
           </a:p>
           <a:p>
             <a:pPr lvl="4"/>
             <a:r>
-              <a:rPr lang="zh-TW" altLang="en-US" smtClean="0"/>
+              <a:rPr lang="zh-TW" altLang="en-US"/>
               <a:t>第五層</a:t>
             </a:r>
-            <a:endParaRPr lang="zh-TW" altLang="en-US"/>
           </a:p>
         </p:txBody>
       </p:sp>
@@ -2228,7 +2210,7 @@
           <a:p>
             <a:pPr lvl="0"/>
             <a:r>
-              <a:rPr lang="zh-TW" altLang="en-US" smtClean="0"/>
+              <a:rPr lang="zh-TW" altLang="en-US"/>
               <a:t>按一下以編輯母片文字樣式</a:t>
             </a:r>
           </a:p>
@@ -2252,7 +2234,7 @@
             <a:fld id="{13AF73FB-44CF-4BEB-A129-C9AADD3689D5}" type="datetimeFigureOut">
               <a:rPr lang="zh-TW" altLang="en-US" smtClean="0"/>
               <a:pPr/>
-              <a:t>2022/7/1</a:t>
+              <a:t>2024/11/30</a:t>
             </a:fld>
             <a:endParaRPr lang="zh-TW" altLang="en-US"/>
           </a:p>
@@ -2351,10 +2333,9 @@
           </a:lstStyle>
           <a:p>
             <a:r>
-              <a:rPr lang="zh-TW" altLang="en-US" smtClean="0"/>
+              <a:rPr lang="zh-TW" altLang="en-US"/>
               <a:t>按一下以編輯母片標題樣式</a:t>
             </a:r>
-            <a:endParaRPr lang="zh-TW" altLang="en-US"/>
           </a:p>
         </p:txBody>
       </p:sp>
@@ -2416,10 +2397,9 @@
           </a:lstStyle>
           <a:p>
             <a:r>
-              <a:rPr lang="zh-TW" altLang="en-US" smtClean="0"/>
+              <a:rPr lang="zh-TW" altLang="en-US"/>
               <a:t>按一下圖示以新增圖片</a:t>
             </a:r>
-            <a:endParaRPr lang="zh-TW" altLang="en-US"/>
           </a:p>
         </p:txBody>
       </p:sp>
@@ -2482,7 +2462,7 @@
           <a:p>
             <a:pPr lvl="0"/>
             <a:r>
-              <a:rPr lang="zh-TW" altLang="en-US" smtClean="0"/>
+              <a:rPr lang="zh-TW" altLang="en-US"/>
               <a:t>按一下以編輯母片文字樣式</a:t>
             </a:r>
           </a:p>
@@ -2506,7 +2486,7 @@
             <a:fld id="{13AF73FB-44CF-4BEB-A129-C9AADD3689D5}" type="datetimeFigureOut">
               <a:rPr lang="zh-TW" altLang="en-US" smtClean="0"/>
               <a:pPr/>
-              <a:t>2022/7/1</a:t>
+              <a:t>2024/11/30</a:t>
             </a:fld>
             <a:endParaRPr lang="zh-TW" altLang="en-US"/>
           </a:p>
@@ -2616,10 +2596,9 @@
           <a:lstStyle/>
           <a:p>
             <a:r>
-              <a:rPr lang="zh-TW" altLang="en-US" smtClean="0"/>
+              <a:rPr lang="zh-TW" altLang="en-US"/>
               <a:t>按一下以編輯母片標題樣式</a:t>
             </a:r>
-            <a:endParaRPr lang="zh-TW" altLang="en-US"/>
           </a:p>
         </p:txBody>
       </p:sp>
@@ -2650,38 +2629,37 @@
           <a:p>
             <a:pPr lvl="0"/>
             <a:r>
-              <a:rPr lang="zh-TW" altLang="en-US" smtClean="0"/>
+              <a:rPr lang="zh-TW" altLang="en-US"/>
               <a:t>按一下以編輯母片文字樣式</a:t>
             </a:r>
           </a:p>
           <a:p>
             <a:pPr lvl="1"/>
             <a:r>
-              <a:rPr lang="zh-TW" altLang="en-US" smtClean="0"/>
+              <a:rPr lang="zh-TW" altLang="en-US"/>
               <a:t>第二層</a:t>
             </a:r>
           </a:p>
           <a:p>
             <a:pPr lvl="2"/>
             <a:r>
-              <a:rPr lang="zh-TW" altLang="en-US" smtClean="0"/>
+              <a:rPr lang="zh-TW" altLang="en-US"/>
               <a:t>第三層</a:t>
             </a:r>
           </a:p>
           <a:p>
             <a:pPr lvl="3"/>
             <a:r>
-              <a:rPr lang="zh-TW" altLang="en-US" smtClean="0"/>
+              <a:rPr lang="zh-TW" altLang="en-US"/>
               <a:t>第四層</a:t>
             </a:r>
           </a:p>
           <a:p>
             <a:pPr lvl="4"/>
             <a:r>
-              <a:rPr lang="zh-TW" altLang="en-US" smtClean="0"/>
+              <a:rPr lang="zh-TW" altLang="en-US"/>
               <a:t>第五層</a:t>
             </a:r>
-            <a:endParaRPr lang="zh-TW" altLang="en-US"/>
           </a:p>
         </p:txBody>
       </p:sp>
@@ -2721,7 +2699,7 @@
             <a:fld id="{13AF73FB-44CF-4BEB-A129-C9AADD3689D5}" type="datetimeFigureOut">
               <a:rPr lang="zh-TW" altLang="en-US" smtClean="0"/>
               <a:pPr/>
-              <a:t>2022/7/1</a:t>
+              <a:t>2024/11/30</a:t>
             </a:fld>
             <a:endParaRPr lang="zh-TW" altLang="en-US"/>
           </a:p>
@@ -3115,7 +3093,7 @@
           <a:lstStyle/>
           <a:p>
             <a:r>
-              <a:rPr lang="zh-CN" altLang="en-US" sz="4000" b="1" u="sng" dirty="0" smtClean="0">
+              <a:rPr lang="zh-CN" altLang="en-US" sz="4000" b="1" u="sng" dirty="0">
                 <a:solidFill>
                   <a:srgbClr val="660033"/>
                 </a:solidFill>
@@ -3132,7 +3110,7 @@
               <a:t>宣道詩 </a:t>
             </a:r>
             <a:r>
-              <a:rPr lang="en-US" altLang="zh-CN" sz="4000" b="1" u="sng" dirty="0" smtClean="0">
+              <a:rPr lang="en-US" altLang="zh-CN" sz="4000" b="1" u="sng" dirty="0">
                 <a:solidFill>
                   <a:srgbClr val="660033"/>
                 </a:solidFill>
@@ -3148,25 +3126,8 @@
               </a:rPr>
               <a:t>50</a:t>
             </a:r>
-            <a:r>
-              <a:rPr lang="en-US" altLang="zh-CN" sz="5400" b="1" i="1" dirty="0" smtClean="0">
-                <a:solidFill>
-                  <a:srgbClr val="660033"/>
-                </a:solidFill>
-                <a:effectLst>
-                  <a:outerShdw blurRad="38100" dist="38100" dir="2700000" algn="tl">
-                    <a:srgbClr val="000000">
-                      <a:alpha val="43137"/>
-                    </a:srgbClr>
-                  </a:outerShdw>
-                </a:effectLst>
-                <a:latin typeface="微軟正黑體" pitchFamily="34" charset="-120"/>
-                <a:ea typeface="微軟正黑體" pitchFamily="34" charset="-120"/>
-              </a:rPr>
-              <a:t/>
-            </a:r>
             <a:br>
-              <a:rPr lang="en-US" altLang="zh-CN" sz="5400" b="1" i="1" dirty="0" smtClean="0">
+              <a:rPr lang="en-US" altLang="zh-CN" sz="5400" b="1" i="1" dirty="0">
                 <a:solidFill>
                   <a:srgbClr val="660033"/>
                 </a:solidFill>
@@ -3182,7 +3143,7 @@
               </a:rPr>
             </a:br>
             <a:r>
-              <a:rPr lang="zh-TW" altLang="en-US" sz="6000" b="1" dirty="0" smtClean="0">
+              <a:rPr lang="zh-TW" altLang="en-US" sz="6000" b="1" dirty="0">
                 <a:solidFill>
                   <a:srgbClr val="000066"/>
                 </a:solidFill>
@@ -3196,44 +3157,10 @@
                 <a:latin typeface="微軟正黑體" pitchFamily="34" charset="-120"/>
                 <a:ea typeface="微軟正黑體" pitchFamily="34" charset="-120"/>
               </a:rPr>
-              <a:t>我</a:t>
-            </a:r>
-            <a:r>
-              <a:rPr lang="zh-TW" altLang="en-US" sz="6000" b="1" dirty="0">
-                <a:solidFill>
-                  <a:srgbClr val="000066"/>
-                </a:solidFill>
-                <a:effectLst>
-                  <a:outerShdw blurRad="38100" dist="38100" dir="2700000" algn="tl">
-                    <a:srgbClr val="000000">
-                      <a:alpha val="43137"/>
-                    </a:srgbClr>
-                  </a:outerShdw>
-                </a:effectLst>
-                <a:latin typeface="微軟正黑體" pitchFamily="34" charset="-120"/>
-                <a:ea typeface="微軟正黑體" pitchFamily="34" charset="-120"/>
-              </a:rPr>
-              <a:t>曾捨命</a:t>
-            </a:r>
-            <a:r>
-              <a:rPr lang="zh-TW" altLang="en-US" sz="6000" b="1" dirty="0" smtClean="0">
-                <a:solidFill>
-                  <a:srgbClr val="000066"/>
-                </a:solidFill>
-                <a:effectLst>
-                  <a:outerShdw blurRad="38100" dist="38100" dir="2700000" algn="tl">
-                    <a:srgbClr val="000000">
-                      <a:alpha val="43137"/>
-                    </a:srgbClr>
-                  </a:outerShdw>
-                </a:effectLst>
-                <a:latin typeface="微軟正黑體" pitchFamily="34" charset="-120"/>
-                <a:ea typeface="微軟正黑體" pitchFamily="34" charset="-120"/>
-              </a:rPr>
-              <a:t>為</a:t>
-            </a:r>
-            <a:r>
-              <a:rPr lang="zh-CN" altLang="en-US" sz="6000" b="1" dirty="0" smtClean="0">
+              <a:t>我曾捨命為</a:t>
+            </a:r>
+            <a:r>
+              <a:rPr lang="zh-CN" altLang="en-US" sz="6000" b="1" dirty="0">
                 <a:solidFill>
                   <a:srgbClr val="000066"/>
                 </a:solidFill>
@@ -3276,13 +3203,6 @@
   <p:clrMapOvr>
     <a:masterClrMapping/>
   </p:clrMapOvr>
-  <p:timing>
-    <p:tnLst>
-      <p:par>
-        <p:cTn id="1" dur="indefinite" restart="never" nodeType="tmRoot"/>
-      </p:par>
-    </p:tnLst>
-  </p:timing>
 </p:sld>
 </file>
 
@@ -3336,90 +3256,23 @@
                 <a:latin typeface="微軟正黑體" pitchFamily="34" charset="-120"/>
                 <a:ea typeface="微軟正黑體" pitchFamily="34" charset="-120"/>
               </a:rPr>
-              <a:t>我曾捨命</a:t>
-            </a:r>
-            <a:r>
-              <a:rPr lang="zh-TW" altLang="en-US" sz="4800" b="1" dirty="0" smtClean="0">
+              <a:t>我曾捨命為你  我血為你流出</a:t>
+            </a:r>
+          </a:p>
+          <a:p>
+            <a:pPr algn="ctr">
+              <a:buNone/>
+            </a:pPr>
+            <a:r>
+              <a:rPr lang="zh-TW" altLang="en-US" sz="4800" b="1" dirty="0">
                 <a:solidFill>
                   <a:srgbClr val="000066"/>
                 </a:solidFill>
                 <a:latin typeface="微軟正黑體" pitchFamily="34" charset="-120"/>
                 <a:ea typeface="微軟正黑體" pitchFamily="34" charset="-120"/>
               </a:rPr>
-              <a:t>為你  我</a:t>
-            </a:r>
-            <a:r>
-              <a:rPr lang="zh-TW" altLang="en-US" sz="4800" b="1" dirty="0">
-                <a:solidFill>
-                  <a:srgbClr val="000066"/>
-                </a:solidFill>
-                <a:latin typeface="微軟正黑體" pitchFamily="34" charset="-120"/>
-                <a:ea typeface="微軟正黑體" pitchFamily="34" charset="-120"/>
-              </a:rPr>
-              <a:t>血</a:t>
-            </a:r>
-            <a:r>
-              <a:rPr lang="zh-TW" altLang="en-US" sz="4800" b="1" dirty="0" smtClean="0">
-                <a:solidFill>
-                  <a:srgbClr val="000066"/>
-                </a:solidFill>
-                <a:latin typeface="微軟正黑體" pitchFamily="34" charset="-120"/>
-                <a:ea typeface="微軟正黑體" pitchFamily="34" charset="-120"/>
-              </a:rPr>
-              <a:t>為你流</a:t>
-            </a:r>
-            <a:r>
-              <a:rPr lang="zh-TW" altLang="en-US" sz="4800" b="1" dirty="0">
-                <a:solidFill>
-                  <a:srgbClr val="000066"/>
-                </a:solidFill>
-                <a:latin typeface="微軟正黑體" pitchFamily="34" charset="-120"/>
-                <a:ea typeface="微軟正黑體" pitchFamily="34" charset="-120"/>
-              </a:rPr>
-              <a:t>出</a:t>
-            </a:r>
-          </a:p>
-          <a:p>
-            <a:pPr algn="ctr">
-              <a:buNone/>
-            </a:pPr>
-            <a:r>
-              <a:rPr lang="zh-TW" altLang="en-US" sz="4800" b="1" dirty="0">
-                <a:solidFill>
-                  <a:srgbClr val="000066"/>
-                </a:solidFill>
-                <a:latin typeface="微軟正黑體" pitchFamily="34" charset="-120"/>
-                <a:ea typeface="微軟正黑體" pitchFamily="34" charset="-120"/>
-              </a:rPr>
-              <a:t>救你從死復</a:t>
-            </a:r>
-            <a:r>
-              <a:rPr lang="zh-TW" altLang="en-US" sz="4800" b="1" dirty="0" smtClean="0">
-                <a:solidFill>
-                  <a:srgbClr val="000066"/>
-                </a:solidFill>
-                <a:latin typeface="微軟正黑體" pitchFamily="34" charset="-120"/>
-                <a:ea typeface="微軟正黑體" pitchFamily="34" charset="-120"/>
-              </a:rPr>
-              <a:t>起  使</a:t>
-            </a:r>
-            <a:r>
-              <a:rPr lang="zh-TW" altLang="en-US" sz="4800" b="1" dirty="0">
-                <a:solidFill>
-                  <a:srgbClr val="000066"/>
-                </a:solidFill>
-                <a:latin typeface="微軟正黑體" pitchFamily="34" charset="-120"/>
-                <a:ea typeface="微軟正黑體" pitchFamily="34" charset="-120"/>
-              </a:rPr>
-              <a:t>你多罪得贖</a:t>
-            </a:r>
-            <a:endParaRPr lang="zh-TW" altLang="en-US" sz="4800" b="1" dirty="0">
-              <a:solidFill>
-                <a:srgbClr val="000066"/>
-              </a:solidFill>
-              <a:latin typeface="微軟正黑體" pitchFamily="34" charset="-120"/>
-              <a:ea typeface="微軟正黑體" pitchFamily="34" charset="-120"/>
-            </a:endParaRPr>
+              <a:t>救你從死復起  使你多罪得贖</a:t>
+            </a:r>
           </a:p>
         </p:txBody>
       </p:sp>
@@ -3447,28 +3300,12 @@
           <a:p>
             <a:pPr algn="ctr"/>
             <a:r>
-              <a:rPr lang="en-US" sz="3600" b="1" dirty="0" smtClean="0">
+              <a:rPr lang="en-US" sz="3600" b="1" dirty="0">
                 <a:solidFill>
                   <a:srgbClr val="000066"/>
                 </a:solidFill>
               </a:rPr>
-              <a:t>( </a:t>
-            </a:r>
-            <a:r>
-              <a:rPr lang="en-US" sz="3600" b="1" dirty="0" smtClean="0">
-                <a:solidFill>
-                  <a:srgbClr val="000066"/>
-                </a:solidFill>
-              </a:rPr>
-              <a:t>1 / 4 </a:t>
-            </a:r>
-            <a:r>
-              <a:rPr lang="en-US" sz="3600" b="1" dirty="0" smtClean="0">
-                <a:solidFill>
-                  <a:srgbClr val="000066"/>
-                </a:solidFill>
-              </a:rPr>
-              <a:t>)</a:t>
+              <a:t>( 1 / 4 )</a:t>
             </a:r>
             <a:endParaRPr lang="vi-VN" sz="3600" b="1" dirty="0">
               <a:solidFill>
@@ -3488,13 +3325,6 @@
   <p:clrMapOvr>
     <a:masterClrMapping/>
   </p:clrMapOvr>
-  <p:timing>
-    <p:tnLst>
-      <p:par>
-        <p:cTn id="1" dur="indefinite" restart="never" nodeType="tmRoot"/>
-      </p:par>
-    </p:tnLst>
-  </p:timing>
 </p:sld>
 </file>
 
@@ -3548,17 +3378,7 @@
                 <a:latin typeface="微軟正黑體" pitchFamily="34" charset="-120"/>
                 <a:ea typeface="微軟正黑體" pitchFamily="34" charset="-120"/>
               </a:rPr>
-              <a:t>為你為你我命曾</a:t>
-            </a:r>
-            <a:r>
-              <a:rPr lang="zh-TW" altLang="en-US" sz="4800" b="1" dirty="0">
-                <a:solidFill>
-                  <a:srgbClr val="000066"/>
-                </a:solidFill>
-                <a:latin typeface="微軟正黑體" pitchFamily="34" charset="-120"/>
-                <a:ea typeface="微軟正黑體" pitchFamily="34" charset="-120"/>
-              </a:rPr>
-              <a:t>捨</a:t>
+              <a:t>為你為你我命曾捨</a:t>
             </a:r>
           </a:p>
           <a:p>
@@ -3614,31 +3434,23 @@
                   <a:srgbClr val="000066"/>
                 </a:solidFill>
               </a:rPr>
-              <a:t>( 1 / 4 </a:t>
-            </a:r>
-            <a:r>
-              <a:rPr lang="en-US" sz="3600" b="1" dirty="0" smtClean="0">
+              <a:t>( 1 / 4 ) ( 2</a:t>
+            </a:r>
+            <a:r>
+              <a:rPr lang="zh-CN" altLang="en-US" sz="3600" b="1" dirty="0">
                 <a:solidFill>
                   <a:srgbClr val="000066"/>
                 </a:solidFill>
               </a:rPr>
-              <a:t>) </a:t>
-            </a:r>
-            <a:r>
-              <a:rPr lang="en-US" sz="3600" b="1" dirty="0" smtClean="0">
+              <a:t>次</a:t>
+            </a:r>
+            <a:r>
+              <a:rPr lang="en-US" sz="3600" b="1" dirty="0">
                 <a:solidFill>
                   <a:srgbClr val="000066"/>
                 </a:solidFill>
               </a:rPr>
-              <a:t>( x2 </a:t>
-            </a:r>
-            <a:r>
-              <a:rPr lang="en-US" sz="3600" b="1" dirty="0" smtClean="0">
-                <a:solidFill>
-                  <a:srgbClr val="000066"/>
-                </a:solidFill>
-              </a:rPr>
-              <a:t>)</a:t>
+              <a:t> )</a:t>
             </a:r>
             <a:endParaRPr lang="vi-VN" sz="3600" b="1" dirty="0">
               <a:solidFill>
@@ -3658,13 +3470,6 @@
   <p:clrMapOvr>
     <a:masterClrMapping/>
   </p:clrMapOvr>
-  <p:timing>
-    <p:tnLst>
-      <p:par>
-        <p:cTn id="1" dur="indefinite" restart="never" nodeType="tmRoot"/>
-      </p:par>
-    </p:tnLst>
-  </p:timing>
 </p:sld>
 </file>
 
@@ -3718,8 +3523,13 @@
                 <a:latin typeface="微軟正黑體" pitchFamily="34" charset="-120"/>
                 <a:ea typeface="微軟正黑體" pitchFamily="34" charset="-120"/>
               </a:rPr>
-              <a:t>我曾離父家</a:t>
-            </a:r>
+              <a:t>我曾離父家庭  並我榮光寶座</a:t>
+            </a:r>
+          </a:p>
+          <a:p>
+            <a:pPr algn="ctr">
+              <a:buNone/>
+            </a:pPr>
             <a:r>
               <a:rPr lang="zh-TW" altLang="en-US" sz="4800" b="1" dirty="0">
                 <a:solidFill>
@@ -3728,52 +3538,7 @@
                 <a:latin typeface="微軟正黑體" pitchFamily="34" charset="-120"/>
                 <a:ea typeface="微軟正黑體" pitchFamily="34" charset="-120"/>
               </a:rPr>
-              <a:t>庭  並</a:t>
-            </a:r>
-            <a:r>
-              <a:rPr lang="zh-TW" altLang="en-US" sz="4800" b="1" dirty="0">
-                <a:solidFill>
-                  <a:srgbClr val="000066"/>
-                </a:solidFill>
-                <a:latin typeface="微軟正黑體" pitchFamily="34" charset="-120"/>
-                <a:ea typeface="微軟正黑體" pitchFamily="34" charset="-120"/>
-              </a:rPr>
-              <a:t>我榮光寶座</a:t>
-            </a:r>
-          </a:p>
-          <a:p>
-            <a:pPr algn="ctr">
-              <a:buNone/>
-            </a:pPr>
-            <a:r>
-              <a:rPr lang="zh-TW" altLang="en-US" sz="4800" b="1" dirty="0">
-                <a:solidFill>
-                  <a:srgbClr val="000066"/>
-                </a:solidFill>
-                <a:latin typeface="微軟正黑體" pitchFamily="34" charset="-120"/>
-                <a:ea typeface="微軟正黑體" pitchFamily="34" charset="-120"/>
-              </a:rPr>
-              <a:t>淒涼悲哀獨</a:t>
-            </a:r>
-            <a:r>
-              <a:rPr lang="zh-TW" altLang="en-US" sz="4800" b="1" dirty="0">
-                <a:solidFill>
-                  <a:srgbClr val="000066"/>
-                </a:solidFill>
-                <a:latin typeface="微軟正黑體" pitchFamily="34" charset="-120"/>
-                <a:ea typeface="微軟正黑體" pitchFamily="34" charset="-120"/>
-              </a:rPr>
-              <a:t>行  在</a:t>
-            </a:r>
-            <a:r>
-              <a:rPr lang="zh-TW" altLang="en-US" sz="4800" b="1" dirty="0">
-                <a:solidFill>
-                  <a:srgbClr val="000066"/>
-                </a:solidFill>
-                <a:latin typeface="微軟正黑體" pitchFamily="34" charset="-120"/>
-                <a:ea typeface="微軟正黑體" pitchFamily="34" charset="-120"/>
-              </a:rPr>
-              <a:t>此暗世經過</a:t>
+              <a:t>淒涼悲哀獨行  在此暗世經過</a:t>
             </a:r>
           </a:p>
         </p:txBody>
@@ -3802,28 +3567,12 @@
           <a:p>
             <a:pPr algn="ctr"/>
             <a:r>
-              <a:rPr lang="en-US" sz="3600" b="1" dirty="0" smtClean="0">
+              <a:rPr lang="en-US" sz="3600" b="1" dirty="0">
                 <a:solidFill>
                   <a:srgbClr val="000066"/>
                 </a:solidFill>
               </a:rPr>
-              <a:t>( </a:t>
-            </a:r>
-            <a:r>
-              <a:rPr lang="en-US" sz="3600" b="1" dirty="0" smtClean="0">
-                <a:solidFill>
-                  <a:srgbClr val="000066"/>
-                </a:solidFill>
-              </a:rPr>
-              <a:t>2 / 4 </a:t>
-            </a:r>
-            <a:r>
-              <a:rPr lang="en-US" sz="3600" b="1" dirty="0" smtClean="0">
-                <a:solidFill>
-                  <a:srgbClr val="000066"/>
-                </a:solidFill>
-              </a:rPr>
-              <a:t>)</a:t>
+              <a:t>( 2 / 4 )</a:t>
             </a:r>
             <a:endParaRPr lang="vi-VN" sz="3600" b="1" dirty="0">
               <a:solidFill>
@@ -3843,13 +3592,6 @@
   <p:clrMapOvr>
     <a:masterClrMapping/>
   </p:clrMapOvr>
-  <p:timing>
-    <p:tnLst>
-      <p:par>
-        <p:cTn id="1" dur="indefinite" restart="never" nodeType="tmRoot"/>
-      </p:par>
-    </p:tnLst>
-  </p:timing>
 </p:sld>
 </file>
 
@@ -3959,15 +3701,15 @@
                   <a:srgbClr val="000066"/>
                 </a:solidFill>
               </a:rPr>
-              <a:t>( </a:t>
-            </a:r>
-            <a:r>
-              <a:rPr lang="en-US" sz="3600" b="1" dirty="0" smtClean="0">
+              <a:t>( 2 / 4 ) ( 2</a:t>
+            </a:r>
+            <a:r>
+              <a:rPr lang="zh-CN" altLang="en-US" sz="3600" b="1" dirty="0">
                 <a:solidFill>
                   <a:srgbClr val="000066"/>
                 </a:solidFill>
               </a:rPr>
-              <a:t>2 </a:t>
+              <a:t>次 </a:t>
             </a:r>
             <a:r>
               <a:rPr lang="en-US" sz="3600" b="1" dirty="0">
@@ -3975,7 +3717,7 @@
                   <a:srgbClr val="000066"/>
                 </a:solidFill>
               </a:rPr>
-              <a:t>/ 4 ) ( x2 )</a:t>
+              <a:t>)</a:t>
             </a:r>
             <a:endParaRPr lang="vi-VN" sz="3600" b="1" dirty="0">
               <a:solidFill>
@@ -3995,13 +3737,6 @@
   <p:clrMapOvr>
     <a:masterClrMapping/>
   </p:clrMapOvr>
-  <p:timing>
-    <p:tnLst>
-      <p:par>
-        <p:cTn id="1" dur="indefinite" restart="never" nodeType="tmRoot"/>
-      </p:par>
-    </p:tnLst>
-  </p:timing>
 </p:sld>
 </file>
 
@@ -4055,8 +3790,13 @@
                 <a:latin typeface="微軟正黑體" pitchFamily="34" charset="-120"/>
                 <a:ea typeface="微軟正黑體" pitchFamily="34" charset="-120"/>
               </a:rPr>
-              <a:t>我曾大受苦</a:t>
-            </a:r>
+              <a:t>我曾大受苦難  非人口舌能說</a:t>
+            </a:r>
+          </a:p>
+          <a:p>
+            <a:pPr algn="ctr">
+              <a:buNone/>
+            </a:pPr>
             <a:r>
               <a:rPr lang="zh-TW" altLang="en-US" sz="4800" b="1" dirty="0">
                 <a:solidFill>
@@ -4065,62 +3805,17 @@
                 <a:latin typeface="微軟正黑體" pitchFamily="34" charset="-120"/>
                 <a:ea typeface="微軟正黑體" pitchFamily="34" charset="-120"/>
               </a:rPr>
-              <a:t>難  非</a:t>
-            </a:r>
-            <a:r>
-              <a:rPr lang="zh-TW" altLang="en-US" sz="4800" b="1" dirty="0">
+              <a:t>臨刑身同罪犯  </a:t>
+            </a:r>
+            <a:r>
+              <a:rPr lang="zh-CN" altLang="en-US" sz="4800" b="1" dirty="0">
                 <a:solidFill>
                   <a:srgbClr val="000066"/>
                 </a:solidFill>
                 <a:latin typeface="微軟正黑體" pitchFamily="34" charset="-120"/>
                 <a:ea typeface="微軟正黑體" pitchFamily="34" charset="-120"/>
               </a:rPr>
-              <a:t>人口舌能說</a:t>
-            </a:r>
-          </a:p>
-          <a:p>
-            <a:pPr algn="ctr">
-              <a:buNone/>
-            </a:pPr>
-            <a:r>
-              <a:rPr lang="zh-TW" altLang="en-US" sz="4800" b="1" dirty="0">
-                <a:solidFill>
-                  <a:srgbClr val="000066"/>
-                </a:solidFill>
-                <a:latin typeface="微軟正黑體" pitchFamily="34" charset="-120"/>
-                <a:ea typeface="微軟正黑體" pitchFamily="34" charset="-120"/>
-              </a:rPr>
-              <a:t>臨刑身同罪</a:t>
-            </a:r>
-            <a:r>
-              <a:rPr lang="zh-TW" altLang="en-US" sz="4800" b="1" dirty="0">
-                <a:solidFill>
-                  <a:srgbClr val="000066"/>
-                </a:solidFill>
-                <a:latin typeface="微軟正黑體" pitchFamily="34" charset="-120"/>
-                <a:ea typeface="微軟正黑體" pitchFamily="34" charset="-120"/>
-              </a:rPr>
-              <a:t>犯  </a:t>
-            </a:r>
-            <a:r>
-              <a:rPr lang="zh-CN" altLang="en-US" sz="4800" b="1" dirty="0">
-                <a:solidFill>
-                  <a:srgbClr val="000066"/>
-                </a:solidFill>
-                <a:latin typeface="微軟正黑體" pitchFamily="34" charset="-120"/>
-                <a:ea typeface="微軟正黑體" pitchFamily="34" charset="-120"/>
-              </a:rPr>
-              <a:t>救</a:t>
-            </a:r>
-            <a:r>
-              <a:rPr lang="zh-CN" altLang="en-US" sz="4800" b="1" dirty="0">
-                <a:solidFill>
-                  <a:srgbClr val="000066"/>
-                </a:solidFill>
-                <a:latin typeface="微軟正黑體" pitchFamily="34" charset="-120"/>
-                <a:ea typeface="微軟正黑體" pitchFamily="34" charset="-120"/>
-              </a:rPr>
-              <a:t>你地獄得脫</a:t>
+              <a:t>救你地獄得脫</a:t>
             </a:r>
             <a:endParaRPr lang="zh-TW" altLang="en-US" sz="4800" b="1" dirty="0">
               <a:solidFill>
@@ -4156,28 +3851,12 @@
           <a:p>
             <a:pPr algn="ctr"/>
             <a:r>
-              <a:rPr lang="en-US" sz="3600" b="1" dirty="0" smtClean="0">
+              <a:rPr lang="en-US" sz="3600" b="1" dirty="0">
                 <a:solidFill>
                   <a:srgbClr val="000066"/>
                 </a:solidFill>
               </a:rPr>
-              <a:t>( </a:t>
-            </a:r>
-            <a:r>
-              <a:rPr lang="en-US" sz="3600" b="1" dirty="0" smtClean="0">
-                <a:solidFill>
-                  <a:srgbClr val="000066"/>
-                </a:solidFill>
-              </a:rPr>
-              <a:t>3 / 4 </a:t>
-            </a:r>
-            <a:r>
-              <a:rPr lang="en-US" sz="3600" b="1" dirty="0" smtClean="0">
-                <a:solidFill>
-                  <a:srgbClr val="000066"/>
-                </a:solidFill>
-              </a:rPr>
-              <a:t>)</a:t>
+              <a:t>( 3 / 4 )</a:t>
             </a:r>
             <a:endParaRPr lang="vi-VN" sz="3600" b="1" dirty="0">
               <a:solidFill>
@@ -4197,13 +3876,6 @@
   <p:clrMapOvr>
     <a:masterClrMapping/>
   </p:clrMapOvr>
-  <p:timing>
-    <p:tnLst>
-      <p:par>
-        <p:cTn id="1" dur="indefinite" restart="never" nodeType="tmRoot"/>
-      </p:par>
-    </p:tnLst>
-  </p:timing>
 </p:sld>
 </file>
 
@@ -4313,15 +3985,15 @@
                   <a:srgbClr val="000066"/>
                 </a:solidFill>
               </a:rPr>
-              <a:t>( </a:t>
-            </a:r>
-            <a:r>
-              <a:rPr lang="en-US" sz="3600" b="1" dirty="0" smtClean="0">
+              <a:t>( 3 / 4 ) ( 2</a:t>
+            </a:r>
+            <a:r>
+              <a:rPr lang="zh-CN" altLang="en-US" sz="3600" b="1" dirty="0">
                 <a:solidFill>
                   <a:srgbClr val="000066"/>
                 </a:solidFill>
               </a:rPr>
-              <a:t>3 </a:t>
+              <a:t>次 </a:t>
             </a:r>
             <a:r>
               <a:rPr lang="en-US" sz="3600" b="1" dirty="0">
@@ -4329,7 +4001,7 @@
                   <a:srgbClr val="000066"/>
                 </a:solidFill>
               </a:rPr>
-              <a:t>/ 4 ) ( x2 )</a:t>
+              <a:t>)</a:t>
             </a:r>
             <a:endParaRPr lang="vi-VN" sz="3600" b="1" dirty="0">
               <a:solidFill>
@@ -4349,13 +4021,6 @@
   <p:clrMapOvr>
     <a:masterClrMapping/>
   </p:clrMapOvr>
-  <p:timing>
-    <p:tnLst>
-      <p:par>
-        <p:cTn id="1" dur="indefinite" restart="never" nodeType="tmRoot"/>
-      </p:par>
-    </p:tnLst>
-  </p:timing>
 </p:sld>
 </file>
 
@@ -4409,27 +4074,7 @@
                 <a:latin typeface="微軟正黑體" pitchFamily="34" charset="-120"/>
                 <a:ea typeface="微軟正黑體" pitchFamily="34" charset="-120"/>
               </a:rPr>
-              <a:t>我曾將父救</a:t>
-            </a:r>
-            <a:r>
-              <a:rPr lang="zh-TW" altLang="en-US" sz="4800" b="1" dirty="0">
-                <a:solidFill>
-                  <a:srgbClr val="000066"/>
-                </a:solidFill>
-                <a:latin typeface="微軟正黑體" pitchFamily="34" charset="-120"/>
-                <a:ea typeface="微軟正黑體" pitchFamily="34" charset="-120"/>
-              </a:rPr>
-              <a:t>恩  從</a:t>
-            </a:r>
-            <a:r>
-              <a:rPr lang="zh-TW" altLang="en-US" sz="4800" b="1" dirty="0">
-                <a:solidFill>
-                  <a:srgbClr val="000066"/>
-                </a:solidFill>
-                <a:latin typeface="微軟正黑體" pitchFamily="34" charset="-120"/>
-                <a:ea typeface="微軟正黑體" pitchFamily="34" charset="-120"/>
-              </a:rPr>
-              <a:t>我天庭</a:t>
+              <a:t>我曾將父救恩  從我天庭</a:t>
             </a:r>
             <a:r>
               <a:rPr lang="zh-CN" altLang="en-US" sz="4800" b="1" dirty="0">
@@ -4461,27 +4106,7 @@
                 <a:latin typeface="微軟正黑體" pitchFamily="34" charset="-120"/>
                 <a:ea typeface="微軟正黑體" pitchFamily="34" charset="-120"/>
               </a:rPr>
-              <a:t>此恩充滿你</a:t>
-            </a:r>
-            <a:r>
-              <a:rPr lang="zh-TW" altLang="en-US" sz="4800" b="1" dirty="0">
-                <a:solidFill>
-                  <a:srgbClr val="000066"/>
-                </a:solidFill>
-                <a:latin typeface="微軟正黑體" pitchFamily="34" charset="-120"/>
-                <a:ea typeface="微軟正黑體" pitchFamily="34" charset="-120"/>
-              </a:rPr>
-              <a:t>身  即</a:t>
-            </a:r>
-            <a:r>
-              <a:rPr lang="zh-TW" altLang="en-US" sz="4800" b="1" dirty="0">
-                <a:solidFill>
-                  <a:srgbClr val="000066"/>
-                </a:solidFill>
-                <a:latin typeface="微軟正黑體" pitchFamily="34" charset="-120"/>
-                <a:ea typeface="微軟正黑體" pitchFamily="34" charset="-120"/>
-              </a:rPr>
-              <a:t>我寬容仁愛</a:t>
+              <a:t>此恩充滿你身  即我寬容仁愛</a:t>
             </a:r>
           </a:p>
         </p:txBody>
@@ -4510,28 +4135,12 @@
           <a:p>
             <a:pPr algn="ctr"/>
             <a:r>
-              <a:rPr lang="en-US" sz="3600" b="1" dirty="0" smtClean="0">
+              <a:rPr lang="en-US" sz="3600" b="1" dirty="0">
                 <a:solidFill>
                   <a:srgbClr val="000066"/>
                 </a:solidFill>
               </a:rPr>
-              <a:t>( </a:t>
-            </a:r>
-            <a:r>
-              <a:rPr lang="en-US" sz="3600" b="1" dirty="0" smtClean="0">
-                <a:solidFill>
-                  <a:srgbClr val="000066"/>
-                </a:solidFill>
-              </a:rPr>
-              <a:t>4 / 4 </a:t>
-            </a:r>
-            <a:r>
-              <a:rPr lang="en-US" sz="3600" b="1" dirty="0" smtClean="0">
-                <a:solidFill>
-                  <a:srgbClr val="000066"/>
-                </a:solidFill>
-              </a:rPr>
-              <a:t>)</a:t>
+              <a:t>( 4 / 4 )</a:t>
             </a:r>
             <a:endParaRPr lang="vi-VN" sz="3600" b="1" dirty="0">
               <a:solidFill>
@@ -4551,13 +4160,6 @@
   <p:clrMapOvr>
     <a:masterClrMapping/>
   </p:clrMapOvr>
-  <p:timing>
-    <p:tnLst>
-      <p:par>
-        <p:cTn id="1" dur="indefinite" restart="never" nodeType="tmRoot"/>
-      </p:par>
-    </p:tnLst>
-  </p:timing>
 </p:sld>
 </file>
 
@@ -4667,15 +4269,23 @@
                   <a:srgbClr val="000066"/>
                 </a:solidFill>
               </a:rPr>
-              <a:t>( </a:t>
-            </a:r>
-            <a:r>
-              <a:rPr lang="en-US" sz="3600" b="1" dirty="0" smtClean="0">
+              <a:t>( 4 / 4 </a:t>
+            </a:r>
+            <a:r>
+              <a:rPr lang="en-US" sz="3600" b="1">
                 <a:solidFill>
                   <a:srgbClr val="000066"/>
                 </a:solidFill>
               </a:rPr>
-              <a:t>4 </a:t>
+              <a:t>) ( 2</a:t>
+            </a:r>
+            <a:r>
+              <a:rPr lang="zh-CN" altLang="en-US" sz="3600" b="1" dirty="0">
+                <a:solidFill>
+                  <a:srgbClr val="000066"/>
+                </a:solidFill>
+              </a:rPr>
+              <a:t>次 </a:t>
             </a:r>
             <a:r>
               <a:rPr lang="en-US" sz="3600" b="1" dirty="0">
@@ -4683,7 +4293,7 @@
                   <a:srgbClr val="000066"/>
                 </a:solidFill>
               </a:rPr>
-              <a:t>/ 4 ) ( x2 )</a:t>
+              <a:t>)</a:t>
             </a:r>
             <a:endParaRPr lang="vi-VN" sz="3600" b="1" dirty="0">
               <a:solidFill>
@@ -4703,13 +4313,6 @@
   <p:clrMapOvr>
     <a:masterClrMapping/>
   </p:clrMapOvr>
-  <p:timing>
-    <p:tnLst>
-      <p:par>
-        <p:cTn id="1" dur="indefinite" restart="never" nodeType="tmRoot"/>
-      </p:par>
-    </p:tnLst>
-  </p:timing>
 </p:sld>
 </file>
 
